--- a/cursos/recursos/desequilibrios-de-material/10-sacrificios-de-peon-estabilidad.pptx
+++ b/cursos/recursos/desequilibrios-de-material/10-sacrificios-de-peon-estabilidad.pptx
@@ -3480,7 +3480,7 @@
                 </a:solidFill>
                 <a:latin typeface="Calibri"/>
               </a:rPr>
-              <a:t>Pista: Pensá en un avance de peón sencillo que le quite a la dama negra la posibilidad de interferir con las maniobras blancas.</a:t>
+              <a:t>Pista: Piensa en un avance de peón sencillo que le quite a la dama negra la posibilidad de interferir con las maniobras blancas.</a:t>
             </a:r>
           </a:p>
         </p:txBody>
@@ -3803,7 +3803,7 @@
                 </a:solidFill>
                 <a:latin typeface="Calibri"/>
               </a:rPr>
-              <a:t>Pista: Pensá en una jugada de dama sencilla que la lleve a una casilla flexible, sin entrar en los cambios que busca el rival.</a:t>
+              <a:t>Pista: Piensa en una jugada de dama sencilla que la lleve a una casilla flexible, sin entrar en los cambios que busca el rival.</a:t>
             </a:r>
           </a:p>
         </p:txBody>
@@ -4040,7 +4040,7 @@
                 </a:solidFill>
                 <a:latin typeface="Calibri"/>
               </a:rPr>
-              <a:t>•  No cuentes sólo los peones de más: evaluá también su movilidad y qué casillas protegen. Un peón extra inmóvil, aislado en una columna abierta, puede no valer nada en la práctica.</a:t>
+              <a:t>•  No cuentes sólo los peones de más: evalúa también su movilidad y qué casillas protegen. Un peón extra inmóvil, aislado en una columna abierta, puede no valer nada en la práctica.</a:t>
             </a:r>
           </a:p>
           <a:p>
@@ -4238,7 +4238,7 @@
                 </a:solidFill>
                 <a:latin typeface="Calibri"/>
               </a:rPr>
-              <a:t>•  El sacrificio de peón para dañar la estructura del rival y frenar su desarrollo puede ser tan valioso como uno que gana tiempo o casillas fuertes: fijate qué piezas rivales quedan sin poder participar.</a:t>
+              <a:t>•  El sacrificio de peón para dañar la estructura del rival y frenar su desarrollo puede ser tan valioso como uno que gana tiempo o casillas fuertes: fíjate qué piezas rivales quedan sin poder participar.</a:t>
             </a:r>
           </a:p>
           <a:p>
@@ -4270,7 +4270,7 @@
                 </a:solidFill>
                 <a:latin typeface="Calibri"/>
               </a:rPr>
-              <a:t>•  Antes de aceptar una estructura de peones dañada, calculá con cuidado qué piezas propias quedarán bloqueadas: a veces el costo posicional es mucho mayor que el material entregado.</a:t>
+              <a:t>•  Antes de aceptar una estructura de peones dañada, calcula con cuidado qué piezas propias quedarán bloqueadas: a veces el costo posicional es mucho mayor que el material entregado.</a:t>
             </a:r>
           </a:p>
         </p:txBody>
@@ -4658,7 +4658,7 @@
                 </a:solidFill>
                 <a:latin typeface="Calibri"/>
               </a:rPr>
-              <a:t>Pista: Pensá en avanzar el peón e ya adelantado, aprovechando que las negras no pueden capturarlo con la dama sin perder una pieza.</a:t>
+              <a:t>Pista: Piensa en avanzar el peón e ya adelantado, aprovechando que las negras no pueden capturarlo con la dama sin perder una pieza.</a:t>
             </a:r>
           </a:p>
         </p:txBody>
@@ -4981,7 +4981,7 @@
                 </a:solidFill>
                 <a:latin typeface="Calibri"/>
               </a:rPr>
-              <a:t>Pista: Pensá en un caballo saltando hacia el centro, listo para continuar su viaje hacia c5 y luego e6.</a:t>
+              <a:t>Pista: Piensa en un caballo saltando hacia el centro, listo para continuar su viaje hacia c5 y luego e6.</a:t>
             </a:r>
           </a:p>
         </p:txBody>
@@ -5304,7 +5304,7 @@
                 </a:solidFill>
                 <a:latin typeface="Calibri"/>
               </a:rPr>
-              <a:t>Pista: Pensá en activar la última torre en una columna abierta, sin apurar la captura en d4.</a:t>
+              <a:t>Pista: Piensa en activar la última torre en una columna abierta, sin apurar la captura en d4.</a:t>
             </a:r>
           </a:p>
         </p:txBody>
@@ -5627,7 +5627,7 @@
                 </a:solidFill>
                 <a:latin typeface="Calibri"/>
               </a:rPr>
-              <a:t>Pista: Pensá en una jugada de dama sencilla que refuerce la amenaza sobre e6 sin perder tiempo.</a:t>
+              <a:t>Pista: Piensa en una jugada de dama sencilla que refuerce la amenaza sobre e6 sin perder tiempo.</a:t>
             </a:r>
           </a:p>
         </p:txBody>
@@ -5848,7 +5848,7 @@
                 </a:solidFill>
                 <a:latin typeface="Calibri"/>
               </a:rPr>
-              <a:t>•  El sacrificio de peón para dañar la estructura del rival y frenar su desarrollo puede ser tan valioso como uno que gana tiempo o casillas fuertes: fijate qué piezas rivales quedan sin poder participar.</a:t>
+              <a:t>•  El sacrificio de peón para dañar la estructura del rival y frenar su desarrollo puede ser tan valioso como uno que gana tiempo o casillas fuertes: fíjate qué piezas rivales quedan sin poder participar.</a:t>
             </a:r>
           </a:p>
           <a:p>
@@ -5880,7 +5880,7 @@
                 </a:solidFill>
                 <a:latin typeface="Calibri"/>
               </a:rPr>
-              <a:t>•  Antes de aceptar una estructura de peones dañada, calculá con cuidado qué piezas propias quedarán bloqueadas: a veces el costo posicional es mucho mayor que el material entregado.</a:t>
+              <a:t>•  Antes de aceptar una estructura de peones dañada, calcula con cuidado qué piezas propias quedarán bloqueadas: a veces el costo posicional es mucho mayor que el material entregado.</a:t>
             </a:r>
           </a:p>
         </p:txBody>
@@ -6253,7 +6253,7 @@
                 </a:solidFill>
                 <a:latin typeface="Calibri"/>
               </a:rPr>
-              <a:t>•  Un peón de más aislado en una columna abierta, sin poder avanzar con seguridad, vale mucho menos de lo que sugiere el marcador material: evaluá siempre su potencial real.</a:t>
+              <a:t>•  Un peón de más aislado en una columna abierta, sin poder avanzar con seguridad, vale mucho menos de lo que sugiere el marcador material: evalúa siempre su potencial real.</a:t>
             </a:r>
           </a:p>
           <a:p>
@@ -6269,7 +6269,7 @@
                 </a:solidFill>
                 <a:latin typeface="Calibri"/>
               </a:rPr>
-              <a:t>•  Antes de capturar un peón aparentemente libre en medio de complicaciones, revisá con cuidado las posibilidades tácticas del rival: un peón 'envenenado' puede costarte la partida.</a:t>
+              <a:t>•  Antes de capturar un peón aparentemente libre en medio de complicaciones, revisa con cuidado las posibilidades tácticas del rival: un peón 'envenenado' puede costarte la partida.</a:t>
             </a:r>
           </a:p>
         </p:txBody>
@@ -6657,7 +6657,7 @@
                 </a:solidFill>
                 <a:latin typeface="Calibri"/>
               </a:rPr>
-              <a:t>Pista: Pensá en capturar en d5, aceptando que las negras recuperen el peón en d4 a cambio de complicaciones favorables.</a:t>
+              <a:t>Pista: Piensa en capturar en d5, aceptando que las negras recuperen el peón en d4 a cambio de complicaciones favorables.</a:t>
             </a:r>
           </a:p>
         </p:txBody>
@@ -6980,7 +6980,7 @@
                 </a:solidFill>
                 <a:latin typeface="Calibri"/>
               </a:rPr>
-              <a:t>Pista: Pensá en un caballo saltando al centro, ofreciendo un cambio que, de aceptarse, deja a las blancas con una estructura sólida y la pareja de alfiles.</a:t>
+              <a:t>Pista: Piensa en un caballo saltando al centro, ofreciendo un cambio que, de aceptarse, deja a las blancas con una estructura sólida y la pareja de alfiles.</a:t>
             </a:r>
           </a:p>
         </p:txBody>
@@ -7303,7 +7303,7 @@
                 </a:solidFill>
                 <a:latin typeface="Calibri"/>
               </a:rPr>
-              <a:t>Pista: Pensá en un caballo saltando al centro del tablero, listo para continuar su viaje hacia una casilla de jaque.</a:t>
+              <a:t>Pista: Piensa en un caballo saltando al centro del tablero, listo para continuar su viaje hacia una casilla de jaque.</a:t>
             </a:r>
           </a:p>
         </p:txBody>
@@ -7626,7 +7626,7 @@
                 </a:solidFill>
                 <a:latin typeface="Calibri"/>
               </a:rPr>
-              <a:t>Pista: Pensá en un salto de caballo con jaque hacia el flanco de rey, aprovechando que el rey debe moverse antes de poder defender otras piezas.</a:t>
+              <a:t>Pista: Piensa en un salto de caballo con jaque hacia el flanco de rey, aprovechando que el rey debe moverse antes de poder defender otras piezas.</a:t>
             </a:r>
           </a:p>
         </p:txBody>
@@ -7863,7 +7863,7 @@
                 </a:solidFill>
                 <a:latin typeface="Calibri"/>
               </a:rPr>
-              <a:t>•  Un peón de más aislado en una columna abierta, sin poder avanzar con seguridad, vale mucho menos de lo que sugiere el marcador material: evaluá siempre su potencial real.</a:t>
+              <a:t>•  Un peón de más aislado en una columna abierta, sin poder avanzar con seguridad, vale mucho menos de lo que sugiere el marcador material: evalúa siempre su potencial real.</a:t>
             </a:r>
           </a:p>
           <a:p>
@@ -7879,7 +7879,7 @@
                 </a:solidFill>
                 <a:latin typeface="Calibri"/>
               </a:rPr>
-              <a:t>•  Antes de capturar un peón aparentemente libre en medio de complicaciones, revisá con cuidado las posibilidades tácticas del rival: un peón 'envenenado' puede costarte la partida.</a:t>
+              <a:t>•  Antes de capturar un peón aparentemente libre en medio de complicaciones, revisa con cuidado las posibilidades tácticas del rival: un peón 'envenenado' puede costarte la partida.</a:t>
             </a:r>
           </a:p>
         </p:txBody>
@@ -8022,7 +8022,7 @@
                 </a:solidFill>
                 <a:latin typeface="Calibri"/>
               </a:rPr>
-              <a:t>Jugá contra el motor la posición inicial de Volokitin–Nyzhnyk con las blancas y practicá el sacrificio e5-e6 para tomar la casilla e5, evaluando en cada jugada si tu posición sigue estable. Después revisá Carlsen–Duda buscando los momentos en que la pareja de alfiles y la mejor coordinación de piezas compensan claramente el peón de menos.</a:t>
+              <a:t>Juega contra el motor la posición inicial de Volokitin–Nyzhnyk con las blancas y practica el sacrificio e5-e6 para tomar la casilla e5, evaluando en cada jugada si tu posición sigue estable. Después revisa Carlsen–Duda buscando los momentos en que la pareja de alfiles y la mejor coordinación de piezas compensan claramente el peón de menos.</a:t>
             </a:r>
           </a:p>
           <a:p>
@@ -8054,7 +8054,7 @@
                 </a:solidFill>
                 <a:latin typeface="Calibri"/>
               </a:rPr>
-              <a:t>En la página del curso podés recorrer cada partida con los comentarios, adivinar las jugadas clave en el tablero y continuar cualquier posición contra el motor (Stockfish). La hoja de ejercicios en PDF reúne los momentos clave de esta lección para resolver sin tablero.</a:t>
+              <a:t>En la página del curso puedes recorrer cada partida con los comentarios, adivinar las jugadas clave en el tablero y continuar cualquier posición contra el motor (Stockfish). La hoja de ejercicios en PDF reúne los momentos clave de esta lección para resolver sin tablero.</a:t>
             </a:r>
           </a:p>
         </p:txBody>
@@ -8093,7 +8093,7 @@
                 </a:solidFill>
                 <a:latin typeface="Calibri"/>
               </a:rPr>
-              <a:t>•  Primero recorré la partida completa leyendo los comentarios.</a:t>
+              <a:t>•  Primero recorre la partida completa leyendo los comentarios.</a:t>
             </a:r>
           </a:p>
           <a:p>
@@ -8109,7 +8109,7 @@
                 </a:solidFill>
                 <a:latin typeface="Calibri"/>
               </a:rPr>
-              <a:t>•  Después hacé el modo "adivinar las jugadas clave" hasta acertar todas.</a:t>
+              <a:t>•  Después haz el modo "adivinar las jugadas clave" hasta acertar todas.</a:t>
             </a:r>
           </a:p>
           <a:p>
@@ -8125,7 +8125,7 @@
                 </a:solidFill>
                 <a:latin typeface="Calibri"/>
               </a:rPr>
-              <a:t>•  Por último respondé el cuestionario y anotá con tus palabras las reglas de la lección.</a:t>
+              <a:t>•  Por último responde el cuestionario y anota con tus palabras las reglas de la lección.</a:t>
             </a:r>
           </a:p>
         </p:txBody>
@@ -8729,7 +8729,7 @@
                 </a:solidFill>
                 <a:latin typeface="Calibri"/>
               </a:rPr>
-              <a:t>•  Antes de sacrificar un peón, comprobá que tu posición vaya a quedar estable, sin riesgo de perder más material.</a:t>
+              <a:t>•  Antes de sacrificar un peón, comprueba que tu posición vaya a quedar estable, sin riesgo de perder más material.</a:t>
             </a:r>
           </a:p>
           <a:p>
@@ -8745,7 +8745,7 @@
                 </a:solidFill>
                 <a:latin typeface="Calibri"/>
               </a:rPr>
-              <a:t>•  Priorizá sacrificios que generen (o acerquen) peones pasados conectados.</a:t>
+              <a:t>•  Prioriza sacrificios que generen (o acerquen) peones pasados conectados.</a:t>
             </a:r>
           </a:p>
           <a:p>
@@ -8777,7 +8777,7 @@
                 </a:solidFill>
                 <a:latin typeface="Calibri"/>
               </a:rPr>
-              <a:t>•  Si sacrificás por una casilla fuerte o para dañar la estructura rival, no te apresures a recuperar el peón.</a:t>
+              <a:t>•  Si sacrificas por una casilla fuerte o para dañar la estructura rival, no te apresures a recuperar el peón.</a:t>
             </a:r>
           </a:p>
           <a:p>
@@ -8793,7 +8793,7 @@
                 </a:solidFill>
                 <a:latin typeface="Calibri"/>
               </a:rPr>
-              <a:t>•  Si aceptás el peón, evaluá si conviene devolverlo a tiempo antes de quedar completamente pasivo.</a:t>
+              <a:t>•  Si aceptas el peón, evalúa si conviene devolverlo a tiempo antes de quedar completamente pasivo.</a:t>
             </a:r>
           </a:p>
         </p:txBody>
@@ -8991,7 +8991,7 @@
                 </a:solidFill>
                 <a:latin typeface="Calibri"/>
               </a:rPr>
-              <a:t>•  No cuentes sólo los peones de más: evaluá también su movilidad y qué casillas protegen. Un peón extra inmóvil y aislado en una columna abierta puede no valer nada en la práctica.</a:t>
+              <a:t>•  No cuentes sólo los peones de más: evalúa también su movilidad y qué casillas protegen. Un peón extra inmóvil y aislado en una columna abierta puede no valer nada en la práctica.</a:t>
             </a:r>
           </a:p>
           <a:p>
@@ -9395,7 +9395,7 @@
                 </a:solidFill>
                 <a:latin typeface="Calibri"/>
               </a:rPr>
-              <a:t>Pista: Pensá en avanzar el peón central que ya está muy adelantado, aprovechando que el alfil negro no puede capturarlo.</a:t>
+              <a:t>Pista: Piensa en avanzar el peón central que ya está muy adelantado, aprovechando que el alfil negro no puede capturarlo.</a:t>
             </a:r>
           </a:p>
         </p:txBody>
